--- a/docs/presentations/dlcpd25-joint-model-architecture.pptx
+++ b/docs/presentations/dlcpd25-joint-model-architecture.pptx
@@ -8991,7 +8991,7 @@
               </a:rPr>
               <a:t>AdamW + Cosine Scheduler
 Weight decay 1e-4
-正式计划 5 epochs</a:t>
+正式计划 10 epochs</a:t>
             </a:r>
           </a:p>
         </p:txBody>
